--- a/it/slides/02-Architettura_dei_Calcolatori-Primo_Contatto_con_Assembly_RISC-V-Lab.pptx
+++ b/it/slides/02-Architettura_dei_Calcolatori-Primo_Contatto_con_Assembly_RISC-V-Lab.pptx
@@ -122,13 +122,13 @@
   <p:extLst>
     <p:ext uri="{521415D9-36F7-43E2-AB2F-B90AF26B5E84}">
       <p14:sectionLst xmlns:p14="http://schemas.microsoft.com/office/powerpoint/2010/main">
-        <p14:section name="Apertura" id="{85b8938b-2605-5a28-1468-2c2b63acbd42}">
+        <p14:section name="Apertura" id="{2764a4bf-eaf8-a72b-b088-4e4e78321b81}">
           <p14:sldIdLst>
             <p14:sldId id="256"/>
             <p14:sldId id="257"/>
           </p14:sldIdLst>
         </p14:section>
-        <p14:section name="La prima cartuccia" id="{3e1fbfce-6ba1-d1f2-c922-45d122ca2c16}">
+        <p14:section name="La prima cartuccia" id="{9aaa5209-b9f3-d4d6-370e-b2027d6cd47e}">
           <p14:sldIdLst>
             <p14:sldId id="258"/>
             <p14:sldId id="259"/>
@@ -137,14 +137,14 @@
             <p14:sldId id="262"/>
           </p14:sldIdLst>
         </p14:section>
-        <p14:section name="Il programma completo" id="{a5d0b9fa-a10e-bc93-0836-db4912f444e5}">
+        <p14:section name="Il programma completo" id="{f3040422-de07-4f5a-0ad8-ba10ae4360b3}">
           <p14:sldIdLst>
             <p14:sldId id="263"/>
             <p14:sldId id="264"/>
             <p14:sldId id="265"/>
           </p14:sldIdLst>
         </p14:section>
-        <p14:section name="Eseguire e provare" id="{91516287-9c39-c084-6e41-e23b2188d435}">
+        <p14:section name="Eseguire e provare" id="{245c92f0-e341-038b-946b-b7160c8b4860}">
           <p14:sldIdLst>
             <p14:sldId id="266"/>
             <p14:sldId id="267"/>
@@ -153,7 +153,7 @@
             <p14:sldId id="270"/>
           </p14:sldIdLst>
         </p14:section>
-        <p14:section name="Esercizi" id="{d82e4367-f540-116f-8613-2e8d12659973}">
+        <p14:section name="Esercizi" id="{3f006170-70b2-ce44-aac5-774aab038141}">
           <p14:sldIdLst>
             <p14:sldId id="271"/>
           </p14:sldIdLst>
@@ -564,7 +564,7 @@
               <a:rPr lang="en-US" dirty="0"/>
               <a:t>Questa è la presentazione del codice della Lezione 02. Mentre la presentazione della lezione sviluppa i concetti, questa raccoglie tutto ciò che si scrive e si esegue: ogni listato con il suo commento, il programma completo della lezione, il risultato che deve produrre, e la procedura per provarlo su ciascuno dei tre host. Le due presentazioni vanno lette insieme: i concetti spiegano il codice, e il codice dà ai concetti una conseguenza osservabile.
 Stato di apprendimento: DA COMPRENDERE OGGI, alla fine di questa lezione lo spiegate, lo seguite passo passo e lo applicate da soli; DA UTILIZZARE OGGI, oggi seguite e usate la ricetta; come funziona dentro si spiega più avanti, o non fa parte del corso; DA COMPRENDERE PIÙ AVANTI, riconoscete il nome e lo scopo; lo spiega una lezione successiva. Una slide senza etichetta è contesto: una storia, un esempio, una domanda, un esercizio.
-Stato di apprendimento di questa lezione. DA COMPRENDERE OGGI: registri, calcolo, trasferimento, salto; i registri; contratto init/update/draw; gli argomenti in a0 ... a7; perché si salva ra; indirizzo, valore, load, store; le istruzioni di base; le pseudo-istruzioni; un'istruzione è un numero; seguire a mano l'esecuzione. DA UTILIZZARE OGGI: la convenzione di chiamata (Lezione 18); le maschere di bit (Lezione 08) e, usati senza essere studiati nel corso, le direttive dell'assemblatore, gli strumenti di PRG32, le chiamate del runtime PRG32, il debugger di PRG32-QT, il programma completo. DA COMPRENDERE PIÙ AVANTI: la pila (Lezione 18); i modi di indirizzamento (Lezione 19); formati delle istruzioni (Lezione 19); l'esadecimale (Lezione 04); il complemento a due (Lezione 05); la virgola fissa (Lezione 06); l'algebra di Boole (Lezione 08); il sommatore (Lezione 09); dai volt ai bit (Lezione 10); latch e flip-flop (Lezione 13); il ciclo del processore (Lezione 19); il progetto Verm1 (Lezione 07). Una slide senza etichetta è contesto: una storia, un esempio, una domanda, un esercizio.</a:t>
+Stato di apprendimento di questa lezione. DA COMPRENDERE OGGI: registri, calcolo, trasferimento, salto; i registri; funzioni, chiamata e ritorno; contratto init/update/draw; leggere una riga di assembly; gli argomenti in a0 ... a7; perché si salva ra; indirizzo, valore, load, store; le istruzioni di base; le pseudo-istruzioni; un'istruzione è un numero; seguire a mano l'esecuzione. DA UTILIZZARE OGGI: l'esadecimale (Lezione 04); bit, byte, parola (Lezione 04); la convenzione di chiamata (Lezione 18); le maschere di bit (Lezione 08) e, usati senza essere studiati nel corso, le direttive dell'assemblatore, gli strumenti di PRG32, le chiamate del runtime PRG32, il debugger di PRG32-QT, il programma completo. DA COMPRENDERE PIÙ AVANTI: la pila (Lezione 18); i modi di indirizzamento (Lezione 19); formati delle istruzioni (Lezione 19); il complemento a due (Lezione 05); la virgola fissa (Lezione 06); l'algebra di Boole (Lezione 08); il sommatore (Lezione 09); dai volt ai bit (Lezione 10); latch e flip-flop (Lezione 13); il ciclo del processore (Lezione 19); il progetto Verm1 (Lezione 07). Una slide senza etichetta è contesto: una storia, un esempio, una domanda, un esercizio.</a:t>
             </a:r>
             <a:endParaRPr lang="en-US" dirty="0"/>
           </a:p>
@@ -1639,7 +1639,7 @@
           <a:p>
             <a:r>
               <a:rPr lang="en-US" dirty="0"/>
-              <a:t>Il terzo passo conserva un valore da un frame al successivo. I registri non mantengono il loro contenuto tra invocazioni successive di update, quindi il valore deve risiedere in memoria. counter è un'etichetta che nomina una posizione della sezione .data contenente una parola. Le quattro istruzioni costituiscono lo schema alla base di ogni variabile: la mette in t0 l'indirizzo della posizione; lw carica il valore in t1; addi lo modifica; sw lo riscrive. Carica, modifica, memorizza: l'idioma che definisce un'architettura load-store. Sullo schermo ancora non cambia nulla: il contatore avanza, ma nulla lo disegna.
+              <a:t>Il terzo passo conserva un valore da un frame al successivo. I registri non mantengono il loro contenuto tra invocazioni successive di update, quindi il valore deve risiedere in memoria. counter è un'etichetta che nomina una posizione della sezione .data, la parte del programma che contiene dati invece di istruzioni; la posizione contiene una parola. Le quattro istruzioni costituiscono lo schema alla base di ogni variabile, un posto in memoria con un nome, il cui valore il programma cambia: la mette in t0 l'indirizzo della posizione; lw carica il valore in t1; addi lo modifica; sw lo riscrive. Carica, modifica, memorizza: l'idioma che definisce un'architettura load-store. Sullo schermo ancora non cambia nulla: il contatore avanza, ma nulla lo disegna.
 DA COMPRENDERE OGGI: indirizzo, valore, load, store.
 Per il docente: Sorgente: labs/05-asm-first-contact/step3_counter.S. Non cambia ancora nulla di visibile: il contatore avanza ma nessuno lo disegna. Chiedere all'aula come si potrebbe dimostrare che avanza (risposta: il debugger di PRG32-QT, oppure il passo successivo).</a:t>
             </a:r>
@@ -1729,7 +1729,7 @@
           <a:p>
             <a:r>
               <a:rPr lang="en-US" dirty="0"/>
-              <a:t>Il quarto passo rende visibile il contatore come una barra verde. Il valore viene caricato, e andi a2, t1, 255 ne conserva solo gli otto bit meno significativi, così la larghezza va da 0 a 255 e poi ricomincia. Gli altri registri portano gli argomenti di prg32_gfx_rect: x, y, larghezza, altezza e colore. Queste otto righe contengono i semi di tre lezioni successive: 255 scritto come 0xFF (la notazione posizionale, Lezione 04), andi usato come maschera (l'algebra di Boole, Lezione 08) e 0x07e0 che indica il verde (la codifica del colore, Lezione 04). Conviene ricordare dove ciascuno è stato incontrato per la prima volta.
+              <a:t>Il quarto passo rende visibile il contatore come una barra verde. Il valore viene caricato, e andi a2, t1, 255 ne conserva solo gli otto bit meno significativi, gli otto a destra, che valgono meno, così la larghezza va da 0 a 255 e poi ricomincia. Gli altri registri portano gli argomenti di prg32_gfx_rect: x, y, larghezza, altezza e colore. Queste otto righe contengono i semi di tre lezioni successive: 255 scritto come 0xFF (la notazione posizionale, Lezione 04), andi usato come maschera (l'algebra di Boole, Lezione 08) e 0x07e0 che indica il verde (la codifica del colore, Lezione 04). Conviene ricordare dove ciascuno è stato incontrato per la prima volta.
 DA UTILIZZARE OGGI: le maschere di bit (si studia nella Lezione 08).
 Per il docente: Sorgente: labs/05-asm-first-contact/step4_bar.S (le righe aggiunte a first_draw). In queste otto righe si nascondono tre lezioni future: 255 = 0xFF (notazione posizionale), andi come maschera di bit (algebra di Boole), 0x07e0 come colore (codifica dell'informazione).</a:t>
             </a:r>
